--- a/Lesson30-Capstone-DeploymentAndReview/Lesson30-Capstone-DeploymentAndReview.pptx
+++ b/Lesson30-Capstone-DeploymentAndReview/Lesson30-Capstone-DeploymentAndReview.pptx
@@ -1215,7 +1215,7 @@
           <a:p>
             <a:r>
               <a:rPr lang="en-US" dirty="0"/>
-              <a:t>Set OPENAI_API_KEY and run the UniversalProjectManager.Api project with the https profile. In the Development environment the root URL redirects to the Scalar UI at scalar slash v1. Choose the POST generate operation and send a body that is a JSON string, in quotes, because the action binds the whole body to a string. The request stays open while the orchestrator runs, and the server console shows the same agent log lines as the console app. The response is 200 OK with the ProjectState serialized as camel-case JSON: the original request, the refined goal, the tasks with their IDs, descriptions, assignments, code and completion flags, and the computed isFullyCompleted. The values on this slide are illustrative and some fields are trimmed; your goal, task IDs and code will differ. The console project still runs exactly like Lesson 29's.</a:t>
+              <a:t>Set OPENAI_API_KEY and run the UniversalProjectManager.Api project with the https profile. In the Development environment the root URL redirects to the Scalar UI at scalar slash v1. Choose the POST generate operation and send a body that is a JSON string, in quotes, because the action binds the whole body to a string. Or open UniversalProjectManager.Api.http in Visual Studio and send its sample request against the http profile. The request stays open while the orchestrator runs, and the server console shows the same agent log lines as the console app. The response is 200 OK with the ProjectState serialized as camel-case JSON: the original request, the refined goal, the tasks with their IDs, descriptions, assignments, code and completion flags, and the computed isFullyCompleted. The values on this slide are illustrative and some fields are trimmed; your goal, task IDs and code will differ. The console project still runs exactly like Lesson 29's.</a:t>
             </a:r>
             <a:endParaRPr lang="en-US" dirty="0"/>
           </a:p>
@@ -1303,7 +1303,7 @@
           <a:p>
             <a:r>
               <a:rPr lang="en-US" dirty="0"/>
-              <a:t>Try this on your own. Create a ProjectRequest record with a Goal property in its own file, change GenerateProject to take it from the body, and keep the empty-goal check returning 400. Restart and check that Scalar now shows a request schema with a goal field. Finally, open UniversalProjectManager.Api.http: it still targets the weatherforecast route from the project template. Replace it with a POST to api/project/generate with a JSON body, so you can test the endpoint straight from Visual Studio.</a:t>
+              <a:t>Try this on your own. Create a ProjectRequest record with a Goal property in its own file, change GenerateProject to take it from the body, and keep the empty-goal check returning 400. Add a second check that returns 400 when the goal is longer than 500 characters, so a pasted essay never reaches the model. Restart and check that Scalar now shows a request schema with a goal field, then update the request bodies in UniversalProjectManager.Api.http to the new object shape and send both the sample idea and an over-long goal straight from Visual Studio.</a:t>
             </a:r>
             <a:endParaRPr lang="en-US" dirty="0"/>
           </a:p>
@@ -9868,7 +9868,7 @@
                 <a:ea typeface="Calibri" pitchFamily="34" charset="-122"/>
                 <a:cs typeface="Calibri" pitchFamily="34" charset="-120"/>
               </a:rPr>
-              <a:t>Accept { "goal": "..." } through a ProjectRequest record in its own file, and point the .http file at the real endpoint.</a:t>
+              <a:t>Accept { "goal": "..." } through a ProjectRequest record in its own file, and reject goals over 500 characters.</a:t>
             </a:r>
             <a:endParaRPr lang="en-US" sz="1400" dirty="0"/>
           </a:p>
@@ -10332,7 +10332,7 @@
                 <a:ea typeface="Calibri" pitchFamily="34" charset="-122"/>
                 <a:cs typeface="Calibri" pitchFamily="34" charset="-120"/>
               </a:rPr>
-              <a:t>UniversalProjectManager.Api.http posts to /api/project/generate</a:t>
+              <a:t>A goal over 500 characters returns 400</a:t>
             </a:r>
             <a:endParaRPr lang="en-US" sz="1300" dirty="0"/>
           </a:p>
